--- a/Figure1/Figure1.pptx
+++ b/Figure1/Figure1.pptx
@@ -197,7 +197,7 @@
           <a:p>
             <a:fld id="{A696AA8C-6609-466C-AF28-5EB5280C8849}" type="datetimeFigureOut">
               <a:rPr lang="en-US" smtClean="0"/>
-              <a:t>03/23/25</a:t>
+              <a:t>12/02/25</a:t>
             </a:fld>
             <a:endParaRPr lang="en-US"/>
           </a:p>
@@ -679,7 +679,7 @@
           <a:p>
             <a:fld id="{C5C72D20-D58A-4A74-A242-2FB25AB710D8}" type="datetimeFigureOut">
               <a:rPr lang="en-US" smtClean="0"/>
-              <a:t>03/19/25</a:t>
+              <a:t>12/02/25</a:t>
             </a:fld>
             <a:endParaRPr lang="en-US"/>
           </a:p>
@@ -849,7 +849,7 @@
           <a:p>
             <a:fld id="{C5C72D20-D58A-4A74-A242-2FB25AB710D8}" type="datetimeFigureOut">
               <a:rPr lang="en-US" smtClean="0"/>
-              <a:t>03/19/25</a:t>
+              <a:t>12/02/25</a:t>
             </a:fld>
             <a:endParaRPr lang="en-US"/>
           </a:p>
@@ -1029,7 +1029,7 @@
           <a:p>
             <a:fld id="{C5C72D20-D58A-4A74-A242-2FB25AB710D8}" type="datetimeFigureOut">
               <a:rPr lang="en-US" smtClean="0"/>
-              <a:t>03/19/25</a:t>
+              <a:t>12/02/25</a:t>
             </a:fld>
             <a:endParaRPr lang="en-US"/>
           </a:p>
@@ -1199,7 +1199,7 @@
           <a:p>
             <a:fld id="{C5C72D20-D58A-4A74-A242-2FB25AB710D8}" type="datetimeFigureOut">
               <a:rPr lang="en-US" smtClean="0"/>
-              <a:t>03/19/25</a:t>
+              <a:t>12/02/25</a:t>
             </a:fld>
             <a:endParaRPr lang="en-US"/>
           </a:p>
@@ -1445,7 +1445,7 @@
           <a:p>
             <a:fld id="{C5C72D20-D58A-4A74-A242-2FB25AB710D8}" type="datetimeFigureOut">
               <a:rPr lang="en-US" smtClean="0"/>
-              <a:t>03/19/25</a:t>
+              <a:t>12/02/25</a:t>
             </a:fld>
             <a:endParaRPr lang="en-US"/>
           </a:p>
@@ -1677,7 +1677,7 @@
           <a:p>
             <a:fld id="{C5C72D20-D58A-4A74-A242-2FB25AB710D8}" type="datetimeFigureOut">
               <a:rPr lang="en-US" smtClean="0"/>
-              <a:t>03/19/25</a:t>
+              <a:t>12/02/25</a:t>
             </a:fld>
             <a:endParaRPr lang="en-US"/>
           </a:p>
@@ -2044,7 +2044,7 @@
           <a:p>
             <a:fld id="{C5C72D20-D58A-4A74-A242-2FB25AB710D8}" type="datetimeFigureOut">
               <a:rPr lang="en-US" smtClean="0"/>
-              <a:t>03/19/25</a:t>
+              <a:t>12/02/25</a:t>
             </a:fld>
             <a:endParaRPr lang="en-US"/>
           </a:p>
@@ -2162,7 +2162,7 @@
           <a:p>
             <a:fld id="{C5C72D20-D58A-4A74-A242-2FB25AB710D8}" type="datetimeFigureOut">
               <a:rPr lang="en-US" smtClean="0"/>
-              <a:t>03/19/25</a:t>
+              <a:t>12/02/25</a:t>
             </a:fld>
             <a:endParaRPr lang="en-US"/>
           </a:p>
@@ -2257,7 +2257,7 @@
           <a:p>
             <a:fld id="{C5C72D20-D58A-4A74-A242-2FB25AB710D8}" type="datetimeFigureOut">
               <a:rPr lang="en-US" smtClean="0"/>
-              <a:t>03/19/25</a:t>
+              <a:t>12/02/25</a:t>
             </a:fld>
             <a:endParaRPr lang="en-US"/>
           </a:p>
@@ -2534,7 +2534,7 @@
           <a:p>
             <a:fld id="{C5C72D20-D58A-4A74-A242-2FB25AB710D8}" type="datetimeFigureOut">
               <a:rPr lang="en-US" smtClean="0"/>
-              <a:t>03/19/25</a:t>
+              <a:t>12/02/25</a:t>
             </a:fld>
             <a:endParaRPr lang="en-US"/>
           </a:p>
@@ -2791,7 +2791,7 @@
           <a:p>
             <a:fld id="{C5C72D20-D58A-4A74-A242-2FB25AB710D8}" type="datetimeFigureOut">
               <a:rPr lang="en-US" smtClean="0"/>
-              <a:t>03/19/25</a:t>
+              <a:t>12/02/25</a:t>
             </a:fld>
             <a:endParaRPr lang="en-US"/>
           </a:p>
@@ -3004,7 +3004,7 @@
           <a:p>
             <a:fld id="{C5C72D20-D58A-4A74-A242-2FB25AB710D8}" type="datetimeFigureOut">
               <a:rPr lang="en-US" smtClean="0"/>
-              <a:t>03/19/25</a:t>
+              <a:t>12/02/25</a:t>
             </a:fld>
             <a:endParaRPr lang="en-US"/>
           </a:p>
@@ -3411,10 +3411,10 @@
       </p:grpSpPr>
       <p:pic>
         <p:nvPicPr>
-          <p:cNvPr id="11" name="Graphic 10">
+          <p:cNvPr id="4" name="Graphic 3">
             <a:extLst>
               <a:ext uri="{FF2B5EF4-FFF2-40B4-BE49-F238E27FC236}">
-                <a16:creationId xmlns:a16="http://schemas.microsoft.com/office/drawing/2014/main" id="{62D3F76C-8B97-2A17-B81F-9E522FB44883}"/>
+                <a16:creationId xmlns:a16="http://schemas.microsoft.com/office/drawing/2014/main" id="{87D580E1-BD93-1363-443C-F4DBA84CD1D9}"/>
               </a:ext>
             </a:extLst>
           </p:cNvPr>
@@ -3437,8 +3437,8 @@
         </p:blipFill>
         <p:spPr>
           <a:xfrm>
-            <a:off x="301319" y="7241109"/>
-            <a:ext cx="6300216" cy="6490453"/>
+            <a:off x="9251019" y="14367911"/>
+            <a:ext cx="8008639" cy="6031984"/>
           </a:xfrm>
           <a:prstGeom prst="rect">
             <a:avLst/>
@@ -3447,10 +3447,10 @@
       </p:pic>
       <p:pic>
         <p:nvPicPr>
-          <p:cNvPr id="9" name="Graphic 8">
+          <p:cNvPr id="11" name="Graphic 10">
             <a:extLst>
               <a:ext uri="{FF2B5EF4-FFF2-40B4-BE49-F238E27FC236}">
-                <a16:creationId xmlns:a16="http://schemas.microsoft.com/office/drawing/2014/main" id="{FE8E0F0D-9846-3180-4D86-341459A62B02}"/>
+                <a16:creationId xmlns:a16="http://schemas.microsoft.com/office/drawing/2014/main" id="{62D3F76C-8B97-2A17-B81F-9E522FB44883}"/>
               </a:ext>
             </a:extLst>
           </p:cNvPr>
@@ -3473,7 +3473,7 @@
         </p:blipFill>
         <p:spPr>
           <a:xfrm>
-            <a:off x="6572517" y="7243078"/>
+            <a:off x="301319" y="7241109"/>
             <a:ext cx="6300216" cy="6490453"/>
           </a:xfrm>
           <a:prstGeom prst="rect">
@@ -3483,10 +3483,10 @@
       </p:pic>
       <p:pic>
         <p:nvPicPr>
-          <p:cNvPr id="7" name="Graphic 6">
+          <p:cNvPr id="9" name="Graphic 8">
             <a:extLst>
               <a:ext uri="{FF2B5EF4-FFF2-40B4-BE49-F238E27FC236}">
-                <a16:creationId xmlns:a16="http://schemas.microsoft.com/office/drawing/2014/main" id="{7295855C-DB98-1117-927A-5081BD56F0AA}"/>
+                <a16:creationId xmlns:a16="http://schemas.microsoft.com/office/drawing/2014/main" id="{FE8E0F0D-9846-3180-4D86-341459A62B02}"/>
               </a:ext>
             </a:extLst>
           </p:cNvPr>
@@ -3509,8 +3509,8 @@
         </p:blipFill>
         <p:spPr>
           <a:xfrm>
-            <a:off x="10038005" y="367621"/>
-            <a:ext cx="6492240" cy="6382574"/>
+            <a:off x="6572517" y="7243078"/>
+            <a:ext cx="6300216" cy="6490453"/>
           </a:xfrm>
           <a:prstGeom prst="rect">
             <a:avLst/>
@@ -3519,10 +3519,10 @@
       </p:pic>
       <p:pic>
         <p:nvPicPr>
-          <p:cNvPr id="5" name="Graphic 4">
+          <p:cNvPr id="7" name="Graphic 6">
             <a:extLst>
               <a:ext uri="{FF2B5EF4-FFF2-40B4-BE49-F238E27FC236}">
-                <a16:creationId xmlns:a16="http://schemas.microsoft.com/office/drawing/2014/main" id="{F391604B-D43C-2416-8A15-C8C4DC76A80C}"/>
+                <a16:creationId xmlns:a16="http://schemas.microsoft.com/office/drawing/2014/main" id="{7295855C-DB98-1117-927A-5081BD56F0AA}"/>
               </a:ext>
             </a:extLst>
           </p:cNvPr>
@@ -3545,8 +3545,8 @@
         </p:blipFill>
         <p:spPr>
           <a:xfrm>
-            <a:off x="284108" y="361167"/>
-            <a:ext cx="8689319" cy="6388884"/>
+            <a:off x="10038005" y="367621"/>
+            <a:ext cx="6492240" cy="6382574"/>
           </a:xfrm>
           <a:prstGeom prst="rect">
             <a:avLst/>
@@ -3555,10 +3555,10 @@
       </p:pic>
       <p:pic>
         <p:nvPicPr>
-          <p:cNvPr id="3" name="Graphic 2">
+          <p:cNvPr id="5" name="Graphic 4">
             <a:extLst>
               <a:ext uri="{FF2B5EF4-FFF2-40B4-BE49-F238E27FC236}">
-                <a16:creationId xmlns:a16="http://schemas.microsoft.com/office/drawing/2014/main" id="{ABF0B7C8-C79E-15E1-27EB-0E1B78D3DD42}"/>
+                <a16:creationId xmlns:a16="http://schemas.microsoft.com/office/drawing/2014/main" id="{F391604B-D43C-2416-8A15-C8C4DC76A80C}"/>
               </a:ext>
             </a:extLst>
           </p:cNvPr>
@@ -3581,8 +3581,8 @@
         </p:blipFill>
         <p:spPr>
           <a:xfrm>
-            <a:off x="18185425" y="418001"/>
-            <a:ext cx="6611521" cy="6410495"/>
+            <a:off x="284108" y="361167"/>
+            <a:ext cx="8689319" cy="6388884"/>
           </a:xfrm>
           <a:prstGeom prst="rect">
             <a:avLst/>
@@ -3591,10 +3591,10 @@
       </p:pic>
       <p:pic>
         <p:nvPicPr>
-          <p:cNvPr id="45" name="Graphic 44">
+          <p:cNvPr id="3" name="Graphic 2">
             <a:extLst>
               <a:ext uri="{FF2B5EF4-FFF2-40B4-BE49-F238E27FC236}">
-                <a16:creationId xmlns:a16="http://schemas.microsoft.com/office/drawing/2014/main" id="{33FC692D-EC7C-9007-CFD0-F3C76EEC8C55}"/>
+                <a16:creationId xmlns:a16="http://schemas.microsoft.com/office/drawing/2014/main" id="{ABF0B7C8-C79E-15E1-27EB-0E1B78D3DD42}"/>
               </a:ext>
             </a:extLst>
           </p:cNvPr>
@@ -3617,6 +3617,42 @@
         </p:blipFill>
         <p:spPr>
           <a:xfrm>
+            <a:off x="18185425" y="418001"/>
+            <a:ext cx="6611521" cy="6410495"/>
+          </a:xfrm>
+          <a:prstGeom prst="rect">
+            <a:avLst/>
+          </a:prstGeom>
+        </p:spPr>
+      </p:pic>
+      <p:pic>
+        <p:nvPicPr>
+          <p:cNvPr id="45" name="Graphic 44">
+            <a:extLst>
+              <a:ext uri="{FF2B5EF4-FFF2-40B4-BE49-F238E27FC236}">
+                <a16:creationId xmlns:a16="http://schemas.microsoft.com/office/drawing/2014/main" id="{33FC692D-EC7C-9007-CFD0-F3C76EEC8C55}"/>
+              </a:ext>
+            </a:extLst>
+          </p:cNvPr>
+          <p:cNvPicPr>
+            <a:picLocks noChangeAspect="1"/>
+          </p:cNvPicPr>
+          <p:nvPr/>
+        </p:nvPicPr>
+        <p:blipFill>
+          <a:blip r:embed="rId15">
+            <a:extLst>
+              <a:ext uri="{96DAC541-7B7A-43D3-8B79-37D633B846F1}">
+                <asvg:svgBlip xmlns:asvg="http://schemas.microsoft.com/office/drawing/2016/SVG/main" r:embed="rId16"/>
+              </a:ext>
+            </a:extLst>
+          </a:blip>
+          <a:stretch>
+            <a:fillRect/>
+          </a:stretch>
+        </p:blipFill>
+        <p:spPr>
+          <a:xfrm>
             <a:off x="117112" y="14443700"/>
             <a:ext cx="8648700" cy="4648200"/>
           </a:xfrm>
@@ -3819,8 +3855,8 @@
         </p:nvSpPr>
         <p:spPr>
           <a:xfrm rot="19707094">
-            <a:off x="3315789" y="18822392"/>
-            <a:ext cx="864339" cy="461665"/>
+            <a:off x="3141298" y="18880757"/>
+            <a:ext cx="1135504" cy="461665"/>
           </a:xfrm>
           <a:prstGeom prst="rect">
             <a:avLst/>
@@ -3839,7 +3875,7 @@
                 <a:ea typeface="DejaVu Sans" panose="020B0603030804020204" pitchFamily="34" charset="0"/>
                 <a:cs typeface="DejaVu Sans" panose="020B0603030804020204" pitchFamily="34" charset="0"/>
               </a:rPr>
-              <a:t>Joint</a:t>
+              <a:t>Paired</a:t>
             </a:r>
           </a:p>
         </p:txBody>
@@ -3936,8 +3972,8 @@
         </p:nvSpPr>
         <p:spPr>
           <a:xfrm rot="19255862">
-            <a:off x="6051297" y="18856810"/>
-            <a:ext cx="864339" cy="461665"/>
+            <a:off x="5876806" y="18915175"/>
+            <a:ext cx="1135504" cy="461665"/>
           </a:xfrm>
           <a:prstGeom prst="rect">
             <a:avLst/>
@@ -3956,7 +3992,7 @@
                 <a:ea typeface="DejaVu Sans" panose="020B0603030804020204" pitchFamily="34" charset="0"/>
                 <a:cs typeface="DejaVu Sans" panose="020B0603030804020204" pitchFamily="34" charset="0"/>
               </a:rPr>
-              <a:t>Joint</a:t>
+              <a:t>Paired</a:t>
             </a:r>
           </a:p>
         </p:txBody>
@@ -4051,45 +4087,6 @@
           </a:fontRef>
         </p:style>
       </p:cxnSp>
-      <p:pic>
-        <p:nvPicPr>
-          <p:cNvPr id="56" name="Content Placeholder 4">
-            <a:extLst>
-              <a:ext uri="{FF2B5EF4-FFF2-40B4-BE49-F238E27FC236}">
-                <a16:creationId xmlns:a16="http://schemas.microsoft.com/office/drawing/2014/main" id="{6BEE7B03-E87D-C374-780A-952EBEF66C5A}"/>
-              </a:ext>
-            </a:extLst>
-          </p:cNvPr>
-          <p:cNvPicPr>
-            <a:picLocks noChangeAspect="1"/>
-          </p:cNvPicPr>
-          <p:nvPr/>
-        </p:nvPicPr>
-        <p:blipFill>
-          <a:blip r:embed="rId15">
-            <a:extLst>
-              <a:ext uri="{28A0092B-C50C-407E-A947-70E740481C1C}">
-                <a14:useLocalDpi xmlns:a14="http://schemas.microsoft.com/office/drawing/2010/main" val="0"/>
-              </a:ext>
-              <a:ext uri="{96DAC541-7B7A-43D3-8B79-37D633B846F1}">
-                <asvg:svgBlip xmlns:asvg="http://schemas.microsoft.com/office/drawing/2016/SVG/main" r:embed="rId16"/>
-              </a:ext>
-            </a:extLst>
-          </a:blip>
-          <a:stretch>
-            <a:fillRect/>
-          </a:stretch>
-        </p:blipFill>
-        <p:spPr>
-          <a:xfrm>
-            <a:off x="9151558" y="14157950"/>
-            <a:ext cx="7898250" cy="6104367"/>
-          </a:xfrm>
-          <a:prstGeom prst="rect">
-            <a:avLst/>
-          </a:prstGeom>
-        </p:spPr>
-      </p:pic>
       <p:pic>
         <p:nvPicPr>
           <p:cNvPr id="57" name="Graphic 56">
